--- a/Lecture13.pptx
+++ b/Lecture13.pptx
@@ -226,7 +226,7 @@
           <a:p>
             <a:fld id="{21F69E75-2F2A-4340-80BD-3C270EF90E93}" type="datetimeFigureOut">
               <a:rPr lang="en-US" smtClean="0"/>
-              <a:t>9/22/26</a:t>
+              <a:t>9/23/26</a:t>
             </a:fld>
             <a:endParaRPr lang="en-US"/>
           </a:p>
@@ -972,7 +972,7 @@
             <a:fld id="{B61BEF0D-F0BB-DE4B-95CE-6DB70DBA9567}" type="datetimeFigureOut">
               <a:rPr lang="en-US" smtClean="0"/>
               <a:pPr/>
-              <a:t>9/22/26</a:t>
+              <a:t>9/23/26</a:t>
             </a:fld>
             <a:endParaRPr lang="en-US" dirty="0"/>
           </a:p>
@@ -1174,7 +1174,7 @@
             <a:fld id="{B61BEF0D-F0BB-DE4B-95CE-6DB70DBA9567}" type="datetimeFigureOut">
               <a:rPr lang="en-US" smtClean="0"/>
               <a:pPr/>
-              <a:t>9/22/26</a:t>
+              <a:t>9/23/26</a:t>
             </a:fld>
             <a:endParaRPr lang="en-US" dirty="0"/>
           </a:p>
@@ -1386,7 +1386,7 @@
             <a:fld id="{B61BEF0D-F0BB-DE4B-95CE-6DB70DBA9567}" type="datetimeFigureOut">
               <a:rPr lang="en-US" smtClean="0"/>
               <a:pPr/>
-              <a:t>9/22/26</a:t>
+              <a:t>9/23/26</a:t>
             </a:fld>
             <a:endParaRPr lang="en-US" dirty="0"/>
           </a:p>
@@ -1588,7 +1588,7 @@
             <a:fld id="{B61BEF0D-F0BB-DE4B-95CE-6DB70DBA9567}" type="datetimeFigureOut">
               <a:rPr lang="en-US" smtClean="0"/>
               <a:pPr/>
-              <a:t>9/22/26</a:t>
+              <a:t>9/23/26</a:t>
             </a:fld>
             <a:endParaRPr lang="en-US" dirty="0"/>
           </a:p>
@@ -1866,7 +1866,7 @@
             <a:fld id="{B61BEF0D-F0BB-DE4B-95CE-6DB70DBA9567}" type="datetimeFigureOut">
               <a:rPr lang="en-US" smtClean="0"/>
               <a:pPr/>
-              <a:t>9/22/26</a:t>
+              <a:t>9/23/26</a:t>
             </a:fld>
             <a:endParaRPr lang="en-US" dirty="0"/>
           </a:p>
@@ -2136,7 +2136,7 @@
             <a:fld id="{B61BEF0D-F0BB-DE4B-95CE-6DB70DBA9567}" type="datetimeFigureOut">
               <a:rPr lang="en-US" smtClean="0"/>
               <a:pPr/>
-              <a:t>9/22/26</a:t>
+              <a:t>9/23/26</a:t>
             </a:fld>
             <a:endParaRPr lang="en-US" dirty="0"/>
           </a:p>
@@ -2553,7 +2553,7 @@
             <a:fld id="{B61BEF0D-F0BB-DE4B-95CE-6DB70DBA9567}" type="datetimeFigureOut">
               <a:rPr lang="en-US" smtClean="0"/>
               <a:pPr/>
-              <a:t>9/22/26</a:t>
+              <a:t>9/23/26</a:t>
             </a:fld>
             <a:endParaRPr lang="en-US" dirty="0"/>
           </a:p>
@@ -2697,7 +2697,7 @@
             <a:fld id="{B61BEF0D-F0BB-DE4B-95CE-6DB70DBA9567}" type="datetimeFigureOut">
               <a:rPr lang="en-US" smtClean="0"/>
               <a:pPr/>
-              <a:t>9/22/26</a:t>
+              <a:t>9/23/26</a:t>
             </a:fld>
             <a:endParaRPr lang="en-US" dirty="0"/>
           </a:p>
@@ -2812,7 +2812,7 @@
             <a:fld id="{B61BEF0D-F0BB-DE4B-95CE-6DB70DBA9567}" type="datetimeFigureOut">
               <a:rPr lang="en-US" smtClean="0"/>
               <a:pPr/>
-              <a:t>9/22/26</a:t>
+              <a:t>9/23/26</a:t>
             </a:fld>
             <a:endParaRPr lang="en-US" dirty="0"/>
           </a:p>
@@ -3127,7 +3127,7 @@
             <a:fld id="{B61BEF0D-F0BB-DE4B-95CE-6DB70DBA9567}" type="datetimeFigureOut">
               <a:rPr lang="en-US" smtClean="0"/>
               <a:pPr/>
-              <a:t>9/22/26</a:t>
+              <a:t>9/23/26</a:t>
             </a:fld>
             <a:endParaRPr lang="en-US" dirty="0"/>
           </a:p>
@@ -3418,7 +3418,7 @@
             <a:fld id="{B61BEF0D-F0BB-DE4B-95CE-6DB70DBA9567}" type="datetimeFigureOut">
               <a:rPr lang="en-US" smtClean="0"/>
               <a:pPr/>
-              <a:t>9/22/26</a:t>
+              <a:t>9/23/26</a:t>
             </a:fld>
             <a:endParaRPr lang="en-US" dirty="0"/>
           </a:p>
@@ -3663,7 +3663,7 @@
             <a:fld id="{B61BEF0D-F0BB-DE4B-95CE-6DB70DBA9567}" type="datetimeFigureOut">
               <a:rPr lang="en-US" smtClean="0"/>
               <a:pPr/>
-              <a:t>9/22/26</a:t>
+              <a:t>9/23/26</a:t>
             </a:fld>
             <a:endParaRPr lang="en-US" dirty="0"/>
           </a:p>
@@ -4143,11 +4143,15 @@
           <a:p>
             <a:r>
               <a:rPr lang="en-US" dirty="0"/>
-              <a:t>Lecture 13 (</a:t>
-            </a:r>
-            <a:r>
-              <a:rPr lang="en-US" b="1" dirty="0"/>
-              <a:t>17/09/2026</a:t>
+              <a:t>Lecture </a:t>
+            </a:r>
+            <a:r>
+              <a:rPr lang="en-US"/>
+              <a:t>13 (</a:t>
+            </a:r>
+            <a:r>
+              <a:rPr lang="en-US" b="1"/>
+              <a:t>22/09/2026</a:t>
             </a:r>
             <a:r>
               <a:rPr lang="en-US" dirty="0"/>
